--- a/Day-6/CSharp_Modules_14_17.pptx
+++ b/Day-6/CSharp_Modules_14_17.pptx
@@ -19,8 +19,9 @@
     <p:sldId id="279" r:id="rId13"/>
     <p:sldId id="287" r:id="rId14"/>
     <p:sldId id="281" r:id="rId15"/>
-    <p:sldId id="282" r:id="rId16"/>
-    <p:sldId id="283" r:id="rId17"/>
+    <p:sldId id="288" r:id="rId16"/>
+    <p:sldId id="282" r:id="rId17"/>
+    <p:sldId id="283" r:id="rId18"/>
   </p:sldIdLst>
   <p:sldSz cx="9144000" cy="6858000" type="screen4x3"/>
   <p:notesSz cx="6858000" cy="9144000"/>
@@ -6771,7 +6772,7 @@
           <a:p>
             <a:fld id="{5BCAD085-E8A6-8845-BD4E-CB4CCA059FC4}" type="datetimeFigureOut">
               <a:rPr lang="en-US" smtClean="0"/>
-              <a:t>5/21/2026</a:t>
+              <a:t>5/25/2026</a:t>
             </a:fld>
             <a:endParaRPr lang="en-US"/>
           </a:p>
@@ -6978,7 +6979,7 @@
           <a:p>
             <a:fld id="{5BCAD085-E8A6-8845-BD4E-CB4CCA059FC4}" type="datetimeFigureOut">
               <a:rPr lang="en-US" smtClean="0"/>
-              <a:t>5/21/2026</a:t>
+              <a:t>5/25/2026</a:t>
             </a:fld>
             <a:endParaRPr lang="en-US"/>
           </a:p>
@@ -7158,7 +7159,7 @@
           <a:p>
             <a:fld id="{5BCAD085-E8A6-8845-BD4E-CB4CCA059FC4}" type="datetimeFigureOut">
               <a:rPr lang="en-US" smtClean="0"/>
-              <a:t>5/21/2026</a:t>
+              <a:t>5/25/2026</a:t>
             </a:fld>
             <a:endParaRPr lang="en-US"/>
           </a:p>
@@ -7363,7 +7364,7 @@
           <a:p>
             <a:fld id="{5BCAD085-E8A6-8845-BD4E-CB4CCA059FC4}" type="datetimeFigureOut">
               <a:rPr lang="en-US" smtClean="0"/>
-              <a:t>5/21/2026</a:t>
+              <a:t>5/25/2026</a:t>
             </a:fld>
             <a:endParaRPr lang="en-US"/>
           </a:p>
@@ -14101,7 +14102,7 @@
           <a:p>
             <a:fld id="{5BCAD085-E8A6-8845-BD4E-CB4CCA059FC4}" type="datetimeFigureOut">
               <a:rPr lang="en-US" smtClean="0"/>
-              <a:t>5/21/2026</a:t>
+              <a:t>5/25/2026</a:t>
             </a:fld>
             <a:endParaRPr lang="en-US"/>
           </a:p>
@@ -14375,7 +14376,7 @@
           <a:p>
             <a:fld id="{5BCAD085-E8A6-8845-BD4E-CB4CCA059FC4}" type="datetimeFigureOut">
               <a:rPr lang="en-US" smtClean="0"/>
-              <a:t>5/21/2026</a:t>
+              <a:t>5/25/2026</a:t>
             </a:fld>
             <a:endParaRPr lang="en-US"/>
           </a:p>
@@ -14778,7 +14779,7 @@
           <a:p>
             <a:fld id="{5BCAD085-E8A6-8845-BD4E-CB4CCA059FC4}" type="datetimeFigureOut">
               <a:rPr lang="en-US" smtClean="0"/>
-              <a:t>5/21/2026</a:t>
+              <a:t>5/25/2026</a:t>
             </a:fld>
             <a:endParaRPr lang="en-US"/>
           </a:p>
@@ -14896,7 +14897,7 @@
           <a:p>
             <a:fld id="{5BCAD085-E8A6-8845-BD4E-CB4CCA059FC4}" type="datetimeFigureOut">
               <a:rPr lang="en-US" smtClean="0"/>
-              <a:t>5/21/2026</a:t>
+              <a:t>5/25/2026</a:t>
             </a:fld>
             <a:endParaRPr lang="en-US"/>
           </a:p>
@@ -14991,7 +14992,7 @@
           <a:p>
             <a:fld id="{5BCAD085-E8A6-8845-BD4E-CB4CCA059FC4}" type="datetimeFigureOut">
               <a:rPr lang="en-US" smtClean="0"/>
-              <a:t>5/21/2026</a:t>
+              <a:t>5/25/2026</a:t>
             </a:fld>
             <a:endParaRPr lang="en-US"/>
           </a:p>
@@ -15283,7 +15284,7 @@
           <a:p>
             <a:fld id="{5BCAD085-E8A6-8845-BD4E-CB4CCA059FC4}" type="datetimeFigureOut">
               <a:rPr lang="en-US" smtClean="0"/>
-              <a:t>5/21/2026</a:t>
+              <a:t>5/25/2026</a:t>
             </a:fld>
             <a:endParaRPr lang="en-US"/>
           </a:p>
@@ -15563,7 +15564,7 @@
           <a:p>
             <a:fld id="{5BCAD085-E8A6-8845-BD4E-CB4CCA059FC4}" type="datetimeFigureOut">
               <a:rPr lang="en-US" smtClean="0"/>
-              <a:t>5/21/2026</a:t>
+              <a:t>5/25/2026</a:t>
             </a:fld>
             <a:endParaRPr lang="en-US"/>
           </a:p>
@@ -15813,7 +15814,7 @@
           <a:p>
             <a:fld id="{5BCAD085-E8A6-8845-BD4E-CB4CCA059FC4}" type="datetimeFigureOut">
               <a:rPr lang="en-US" smtClean="0"/>
-              <a:t>5/21/2026</a:t>
+              <a:t>5/25/2026</a:t>
             </a:fld>
             <a:endParaRPr lang="en-US"/>
           </a:p>
@@ -20678,6 +20679,853 @@
       </p:grpSpPr>
       <p:sp>
         <p:nvSpPr>
+          <p:cNvPr id="2" name="Title 1">
+            <a:extLst>
+              <a:ext uri="{FF2B5EF4-FFF2-40B4-BE49-F238E27FC236}">
+                <a16:creationId xmlns:a16="http://schemas.microsoft.com/office/drawing/2014/main" id="{D5B8EEE0-DDC3-C8E7-0835-58933B3787AF}"/>
+              </a:ext>
+            </a:extLst>
+          </p:cNvPr>
+          <p:cNvSpPr>
+            <a:spLocks noGrp="1"/>
+          </p:cNvSpPr>
+          <p:nvPr>
+            <p:ph type="title"/>
+          </p:nvPr>
+        </p:nvSpPr>
+        <p:spPr/>
+        <p:txBody>
+          <a:bodyPr/>
+          <a:lstStyle/>
+          <a:p>
+            <a:r>
+              <a:rPr lang="en-US" dirty="0"/>
+              <a:t>Methods</a:t>
+            </a:r>
+            <a:endParaRPr lang="en-IN" dirty="0"/>
+          </a:p>
+        </p:txBody>
+      </p:sp>
+      <p:graphicFrame>
+        <p:nvGraphicFramePr>
+          <p:cNvPr id="5" name="Content Placeholder 4">
+            <a:extLst>
+              <a:ext uri="{FF2B5EF4-FFF2-40B4-BE49-F238E27FC236}">
+                <a16:creationId xmlns:a16="http://schemas.microsoft.com/office/drawing/2014/main" id="{74587CD7-6E37-D552-30FF-806D2D3C00AB}"/>
+              </a:ext>
+            </a:extLst>
+          </p:cNvPr>
+          <p:cNvGraphicFramePr>
+            <a:graphicFrameLocks noGrp="1"/>
+          </p:cNvGraphicFramePr>
+          <p:nvPr>
+            <p:ph idx="1"/>
+            <p:extLst>
+              <p:ext uri="{D42A27DB-BD31-4B8C-83A1-F6EECF244321}">
+                <p14:modId xmlns:p14="http://schemas.microsoft.com/office/powerpoint/2010/main" val="1029656979"/>
+              </p:ext>
+            </p:extLst>
+          </p:nvPr>
+        </p:nvGraphicFramePr>
+        <p:xfrm>
+          <a:off x="768349" y="2209801"/>
+          <a:ext cx="7889876" cy="4229104"/>
+        </p:xfrm>
+        <a:graphic>
+          <a:graphicData uri="http://schemas.openxmlformats.org/drawingml/2006/table">
+            <a:tbl>
+              <a:tblPr firstRow="1" firstCol="1" bandRow="1">
+                <a:tableStyleId>{5C22544A-7EE6-4342-B048-85BDC9FD1C3A}</a:tableStyleId>
+              </a:tblPr>
+              <a:tblGrid>
+                <a:gridCol w="3944938">
+                  <a:extLst>
+                    <a:ext uri="{9D8B030D-6E8A-4147-A177-3AD203B41FA5}">
+                      <a16:colId xmlns:a16="http://schemas.microsoft.com/office/drawing/2014/main" val="3161484319"/>
+                    </a:ext>
+                  </a:extLst>
+                </a:gridCol>
+                <a:gridCol w="3944938">
+                  <a:extLst>
+                    <a:ext uri="{9D8B030D-6E8A-4147-A177-3AD203B41FA5}">
+                      <a16:colId xmlns:a16="http://schemas.microsoft.com/office/drawing/2014/main" val="62877783"/>
+                    </a:ext>
+                  </a:extLst>
+                </a:gridCol>
+              </a:tblGrid>
+              <a:tr h="384464">
+                <a:tc>
+                  <a:txBody>
+                    <a:bodyPr/>
+                    <a:lstStyle/>
+                    <a:p>
+                      <a:pPr>
+                        <a:lnSpc>
+                          <a:spcPct val="115000"/>
+                        </a:lnSpc>
+                        <a:spcAft>
+                          <a:spcPts val="1000"/>
+                        </a:spcAft>
+                        <a:buNone/>
+                      </a:pPr>
+                      <a:r>
+                        <a:rPr lang="en-IN" sz="1100">
+                          <a:effectLst/>
+                        </a:rPr>
+                        <a:t>Method</a:t>
+                      </a:r>
+                      <a:endParaRPr lang="en-IN" sz="1100">
+                        <a:effectLst/>
+                        <a:latin typeface="Calibri" panose="020F0502020204030204" pitchFamily="34" charset="0"/>
+                        <a:ea typeface="Calibri" panose="020F0502020204030204" pitchFamily="34" charset="0"/>
+                        <a:cs typeface="Times New Roman" panose="02020603050405020304" pitchFamily="18" charset="0"/>
+                      </a:endParaRPr>
+                    </a:p>
+                  </a:txBody>
+                  <a:tcPr marL="9525" marR="9525" marT="9525" marB="9525" anchor="ctr"/>
+                </a:tc>
+                <a:tc>
+                  <a:txBody>
+                    <a:bodyPr/>
+                    <a:lstStyle/>
+                    <a:p>
+                      <a:pPr>
+                        <a:lnSpc>
+                          <a:spcPct val="115000"/>
+                        </a:lnSpc>
+                        <a:spcAft>
+                          <a:spcPts val="1000"/>
+                        </a:spcAft>
+                        <a:buNone/>
+                      </a:pPr>
+                      <a:r>
+                        <a:rPr lang="en-IN" sz="1100">
+                          <a:effectLst/>
+                        </a:rPr>
+                        <a:t>Purpose</a:t>
+                      </a:r>
+                      <a:endParaRPr lang="en-IN" sz="1100">
+                        <a:effectLst/>
+                        <a:latin typeface="Calibri" panose="020F0502020204030204" pitchFamily="34" charset="0"/>
+                        <a:ea typeface="Calibri" panose="020F0502020204030204" pitchFamily="34" charset="0"/>
+                        <a:cs typeface="Times New Roman" panose="02020603050405020304" pitchFamily="18" charset="0"/>
+                      </a:endParaRPr>
+                    </a:p>
+                  </a:txBody>
+                  <a:tcPr marL="9525" marR="9525" marT="9525" marB="9525" anchor="ctr"/>
+                </a:tc>
+                <a:extLst>
+                  <a:ext uri="{0D108BD9-81ED-4DB2-BD59-A6C34878D82A}">
+                    <a16:rowId xmlns:a16="http://schemas.microsoft.com/office/drawing/2014/main" val="1465958913"/>
+                  </a:ext>
+                </a:extLst>
+              </a:tr>
+              <a:tr h="384464">
+                <a:tc>
+                  <a:txBody>
+                    <a:bodyPr/>
+                    <a:lstStyle/>
+                    <a:p>
+                      <a:pPr>
+                        <a:lnSpc>
+                          <a:spcPct val="115000"/>
+                        </a:lnSpc>
+                        <a:spcAft>
+                          <a:spcPts val="1000"/>
+                        </a:spcAft>
+                        <a:buNone/>
+                      </a:pPr>
+                      <a:r>
+                        <a:rPr lang="en-IN" sz="1100">
+                          <a:effectLst/>
+                        </a:rPr>
+                        <a:t>Start()</a:t>
+                      </a:r>
+                      <a:endParaRPr lang="en-IN" sz="1100">
+                        <a:effectLst/>
+                        <a:latin typeface="Calibri" panose="020F0502020204030204" pitchFamily="34" charset="0"/>
+                        <a:ea typeface="Calibri" panose="020F0502020204030204" pitchFamily="34" charset="0"/>
+                        <a:cs typeface="Times New Roman" panose="02020603050405020304" pitchFamily="18" charset="0"/>
+                      </a:endParaRPr>
+                    </a:p>
+                  </a:txBody>
+                  <a:tcPr marL="9525" marR="9525" marT="9525" marB="9525" anchor="ctr"/>
+                </a:tc>
+                <a:tc>
+                  <a:txBody>
+                    <a:bodyPr/>
+                    <a:lstStyle/>
+                    <a:p>
+                      <a:pPr>
+                        <a:lnSpc>
+                          <a:spcPct val="115000"/>
+                        </a:lnSpc>
+                        <a:spcAft>
+                          <a:spcPts val="1000"/>
+                        </a:spcAft>
+                        <a:buNone/>
+                      </a:pPr>
+                      <a:r>
+                        <a:rPr lang="en-IN" sz="1100">
+                          <a:effectLst/>
+                        </a:rPr>
+                        <a:t>Starts thread</a:t>
+                      </a:r>
+                      <a:endParaRPr lang="en-IN" sz="1100">
+                        <a:effectLst/>
+                        <a:latin typeface="Calibri" panose="020F0502020204030204" pitchFamily="34" charset="0"/>
+                        <a:ea typeface="Calibri" panose="020F0502020204030204" pitchFamily="34" charset="0"/>
+                        <a:cs typeface="Times New Roman" panose="02020603050405020304" pitchFamily="18" charset="0"/>
+                      </a:endParaRPr>
+                    </a:p>
+                  </a:txBody>
+                  <a:tcPr marL="9525" marR="9525" marT="9525" marB="9525" anchor="ctr"/>
+                </a:tc>
+                <a:extLst>
+                  <a:ext uri="{0D108BD9-81ED-4DB2-BD59-A6C34878D82A}">
+                    <a16:rowId xmlns:a16="http://schemas.microsoft.com/office/drawing/2014/main" val="3178433606"/>
+                  </a:ext>
+                </a:extLst>
+              </a:tr>
+              <a:tr h="384464">
+                <a:tc>
+                  <a:txBody>
+                    <a:bodyPr/>
+                    <a:lstStyle/>
+                    <a:p>
+                      <a:pPr>
+                        <a:lnSpc>
+                          <a:spcPct val="115000"/>
+                        </a:lnSpc>
+                        <a:spcAft>
+                          <a:spcPts val="1000"/>
+                        </a:spcAft>
+                        <a:buNone/>
+                      </a:pPr>
+                      <a:r>
+                        <a:rPr lang="en-IN" sz="1100">
+                          <a:effectLst/>
+                        </a:rPr>
+                        <a:t>Sleep()</a:t>
+                      </a:r>
+                      <a:endParaRPr lang="en-IN" sz="1100">
+                        <a:effectLst/>
+                        <a:latin typeface="Calibri" panose="020F0502020204030204" pitchFamily="34" charset="0"/>
+                        <a:ea typeface="Calibri" panose="020F0502020204030204" pitchFamily="34" charset="0"/>
+                        <a:cs typeface="Times New Roman" panose="02020603050405020304" pitchFamily="18" charset="0"/>
+                      </a:endParaRPr>
+                    </a:p>
+                  </a:txBody>
+                  <a:tcPr marL="9525" marR="9525" marT="9525" marB="9525" anchor="ctr"/>
+                </a:tc>
+                <a:tc>
+                  <a:txBody>
+                    <a:bodyPr/>
+                    <a:lstStyle/>
+                    <a:p>
+                      <a:pPr>
+                        <a:lnSpc>
+                          <a:spcPct val="115000"/>
+                        </a:lnSpc>
+                        <a:spcAft>
+                          <a:spcPts val="1000"/>
+                        </a:spcAft>
+                        <a:buNone/>
+                      </a:pPr>
+                      <a:r>
+                        <a:rPr lang="en-IN" sz="1100">
+                          <a:effectLst/>
+                        </a:rPr>
+                        <a:t>Pause thread</a:t>
+                      </a:r>
+                      <a:endParaRPr lang="en-IN" sz="1100">
+                        <a:effectLst/>
+                        <a:latin typeface="Calibri" panose="020F0502020204030204" pitchFamily="34" charset="0"/>
+                        <a:ea typeface="Calibri" panose="020F0502020204030204" pitchFamily="34" charset="0"/>
+                        <a:cs typeface="Times New Roman" panose="02020603050405020304" pitchFamily="18" charset="0"/>
+                      </a:endParaRPr>
+                    </a:p>
+                  </a:txBody>
+                  <a:tcPr marL="9525" marR="9525" marT="9525" marB="9525" anchor="ctr"/>
+                </a:tc>
+                <a:extLst>
+                  <a:ext uri="{0D108BD9-81ED-4DB2-BD59-A6C34878D82A}">
+                    <a16:rowId xmlns:a16="http://schemas.microsoft.com/office/drawing/2014/main" val="864977784"/>
+                  </a:ext>
+                </a:extLst>
+              </a:tr>
+              <a:tr h="384464">
+                <a:tc>
+                  <a:txBody>
+                    <a:bodyPr/>
+                    <a:lstStyle/>
+                    <a:p>
+                      <a:pPr>
+                        <a:lnSpc>
+                          <a:spcPct val="115000"/>
+                        </a:lnSpc>
+                        <a:spcAft>
+                          <a:spcPts val="1000"/>
+                        </a:spcAft>
+                        <a:buNone/>
+                      </a:pPr>
+                      <a:r>
+                        <a:rPr lang="en-IN" sz="1100">
+                          <a:effectLst/>
+                        </a:rPr>
+                        <a:t>Join()</a:t>
+                      </a:r>
+                      <a:endParaRPr lang="en-IN" sz="1100">
+                        <a:effectLst/>
+                        <a:latin typeface="Calibri" panose="020F0502020204030204" pitchFamily="34" charset="0"/>
+                        <a:ea typeface="Calibri" panose="020F0502020204030204" pitchFamily="34" charset="0"/>
+                        <a:cs typeface="Times New Roman" panose="02020603050405020304" pitchFamily="18" charset="0"/>
+                      </a:endParaRPr>
+                    </a:p>
+                  </a:txBody>
+                  <a:tcPr marL="9525" marR="9525" marT="9525" marB="9525" anchor="ctr"/>
+                </a:tc>
+                <a:tc>
+                  <a:txBody>
+                    <a:bodyPr/>
+                    <a:lstStyle/>
+                    <a:p>
+                      <a:pPr>
+                        <a:lnSpc>
+                          <a:spcPct val="115000"/>
+                        </a:lnSpc>
+                        <a:spcAft>
+                          <a:spcPts val="1000"/>
+                        </a:spcAft>
+                        <a:buNone/>
+                      </a:pPr>
+                      <a:r>
+                        <a:rPr lang="en-IN" sz="1100">
+                          <a:effectLst/>
+                        </a:rPr>
+                        <a:t>Wait for thread completion</a:t>
+                      </a:r>
+                      <a:endParaRPr lang="en-IN" sz="1100">
+                        <a:effectLst/>
+                        <a:latin typeface="Calibri" panose="020F0502020204030204" pitchFamily="34" charset="0"/>
+                        <a:ea typeface="Calibri" panose="020F0502020204030204" pitchFamily="34" charset="0"/>
+                        <a:cs typeface="Times New Roman" panose="02020603050405020304" pitchFamily="18" charset="0"/>
+                      </a:endParaRPr>
+                    </a:p>
+                  </a:txBody>
+                  <a:tcPr marL="9525" marR="9525" marT="9525" marB="9525" anchor="ctr"/>
+                </a:tc>
+                <a:extLst>
+                  <a:ext uri="{0D108BD9-81ED-4DB2-BD59-A6C34878D82A}">
+                    <a16:rowId xmlns:a16="http://schemas.microsoft.com/office/drawing/2014/main" val="128947459"/>
+                  </a:ext>
+                </a:extLst>
+              </a:tr>
+              <a:tr h="384464">
+                <a:tc>
+                  <a:txBody>
+                    <a:bodyPr/>
+                    <a:lstStyle/>
+                    <a:p>
+                      <a:pPr>
+                        <a:lnSpc>
+                          <a:spcPct val="115000"/>
+                        </a:lnSpc>
+                        <a:spcAft>
+                          <a:spcPts val="1000"/>
+                        </a:spcAft>
+                        <a:buNone/>
+                      </a:pPr>
+                      <a:r>
+                        <a:rPr lang="en-IN" sz="1100">
+                          <a:effectLst/>
+                        </a:rPr>
+                        <a:t>Abort()</a:t>
+                      </a:r>
+                      <a:endParaRPr lang="en-IN" sz="1100">
+                        <a:effectLst/>
+                        <a:latin typeface="Calibri" panose="020F0502020204030204" pitchFamily="34" charset="0"/>
+                        <a:ea typeface="Calibri" panose="020F0502020204030204" pitchFamily="34" charset="0"/>
+                        <a:cs typeface="Times New Roman" panose="02020603050405020304" pitchFamily="18" charset="0"/>
+                      </a:endParaRPr>
+                    </a:p>
+                  </a:txBody>
+                  <a:tcPr marL="9525" marR="9525" marT="9525" marB="9525" anchor="ctr"/>
+                </a:tc>
+                <a:tc>
+                  <a:txBody>
+                    <a:bodyPr/>
+                    <a:lstStyle/>
+                    <a:p>
+                      <a:pPr>
+                        <a:lnSpc>
+                          <a:spcPct val="115000"/>
+                        </a:lnSpc>
+                        <a:spcAft>
+                          <a:spcPts val="1000"/>
+                        </a:spcAft>
+                        <a:buNone/>
+                      </a:pPr>
+                      <a:r>
+                        <a:rPr lang="en-IN" sz="1100">
+                          <a:effectLst/>
+                        </a:rPr>
+                        <a:t>Stops thread (obsolete)</a:t>
+                      </a:r>
+                      <a:endParaRPr lang="en-IN" sz="1100">
+                        <a:effectLst/>
+                        <a:latin typeface="Calibri" panose="020F0502020204030204" pitchFamily="34" charset="0"/>
+                        <a:ea typeface="Calibri" panose="020F0502020204030204" pitchFamily="34" charset="0"/>
+                        <a:cs typeface="Times New Roman" panose="02020603050405020304" pitchFamily="18" charset="0"/>
+                      </a:endParaRPr>
+                    </a:p>
+                  </a:txBody>
+                  <a:tcPr marL="9525" marR="9525" marT="9525" marB="9525" anchor="ctr"/>
+                </a:tc>
+                <a:extLst>
+                  <a:ext uri="{0D108BD9-81ED-4DB2-BD59-A6C34878D82A}">
+                    <a16:rowId xmlns:a16="http://schemas.microsoft.com/office/drawing/2014/main" val="604997865"/>
+                  </a:ext>
+                </a:extLst>
+              </a:tr>
+              <a:tr h="384464">
+                <a:tc>
+                  <a:txBody>
+                    <a:bodyPr/>
+                    <a:lstStyle/>
+                    <a:p>
+                      <a:pPr>
+                        <a:lnSpc>
+                          <a:spcPct val="115000"/>
+                        </a:lnSpc>
+                        <a:spcAft>
+                          <a:spcPts val="1000"/>
+                        </a:spcAft>
+                        <a:buNone/>
+                      </a:pPr>
+                      <a:r>
+                        <a:rPr lang="en-IN" sz="1100">
+                          <a:effectLst/>
+                        </a:rPr>
+                        <a:t>Interrupt()</a:t>
+                      </a:r>
+                      <a:endParaRPr lang="en-IN" sz="1100">
+                        <a:effectLst/>
+                        <a:latin typeface="Calibri" panose="020F0502020204030204" pitchFamily="34" charset="0"/>
+                        <a:ea typeface="Calibri" panose="020F0502020204030204" pitchFamily="34" charset="0"/>
+                        <a:cs typeface="Times New Roman" panose="02020603050405020304" pitchFamily="18" charset="0"/>
+                      </a:endParaRPr>
+                    </a:p>
+                  </a:txBody>
+                  <a:tcPr marL="9525" marR="9525" marT="9525" marB="9525" anchor="ctr"/>
+                </a:tc>
+                <a:tc>
+                  <a:txBody>
+                    <a:bodyPr/>
+                    <a:lstStyle/>
+                    <a:p>
+                      <a:pPr>
+                        <a:lnSpc>
+                          <a:spcPct val="115000"/>
+                        </a:lnSpc>
+                        <a:spcAft>
+                          <a:spcPts val="1000"/>
+                        </a:spcAft>
+                        <a:buNone/>
+                      </a:pPr>
+                      <a:r>
+                        <a:rPr lang="en-IN" sz="1100">
+                          <a:effectLst/>
+                        </a:rPr>
+                        <a:t>Interrupt sleeping thread</a:t>
+                      </a:r>
+                      <a:endParaRPr lang="en-IN" sz="1100">
+                        <a:effectLst/>
+                        <a:latin typeface="Calibri" panose="020F0502020204030204" pitchFamily="34" charset="0"/>
+                        <a:ea typeface="Calibri" panose="020F0502020204030204" pitchFamily="34" charset="0"/>
+                        <a:cs typeface="Times New Roman" panose="02020603050405020304" pitchFamily="18" charset="0"/>
+                      </a:endParaRPr>
+                    </a:p>
+                  </a:txBody>
+                  <a:tcPr marL="9525" marR="9525" marT="9525" marB="9525" anchor="ctr"/>
+                </a:tc>
+                <a:extLst>
+                  <a:ext uri="{0D108BD9-81ED-4DB2-BD59-A6C34878D82A}">
+                    <a16:rowId xmlns:a16="http://schemas.microsoft.com/office/drawing/2014/main" val="918058032"/>
+                  </a:ext>
+                </a:extLst>
+              </a:tr>
+              <a:tr h="384464">
+                <a:tc>
+                  <a:txBody>
+                    <a:bodyPr/>
+                    <a:lstStyle/>
+                    <a:p>
+                      <a:pPr>
+                        <a:lnSpc>
+                          <a:spcPct val="115000"/>
+                        </a:lnSpc>
+                        <a:spcAft>
+                          <a:spcPts val="1000"/>
+                        </a:spcAft>
+                        <a:buNone/>
+                      </a:pPr>
+                      <a:r>
+                        <a:rPr lang="en-IN" sz="1100">
+                          <a:effectLst/>
+                        </a:rPr>
+                        <a:t>Suspend()</a:t>
+                      </a:r>
+                      <a:endParaRPr lang="en-IN" sz="1100">
+                        <a:effectLst/>
+                        <a:latin typeface="Calibri" panose="020F0502020204030204" pitchFamily="34" charset="0"/>
+                        <a:ea typeface="Calibri" panose="020F0502020204030204" pitchFamily="34" charset="0"/>
+                        <a:cs typeface="Times New Roman" panose="02020603050405020304" pitchFamily="18" charset="0"/>
+                      </a:endParaRPr>
+                    </a:p>
+                  </a:txBody>
+                  <a:tcPr marL="9525" marR="9525" marT="9525" marB="9525" anchor="ctr"/>
+                </a:tc>
+                <a:tc>
+                  <a:txBody>
+                    <a:bodyPr/>
+                    <a:lstStyle/>
+                    <a:p>
+                      <a:pPr>
+                        <a:lnSpc>
+                          <a:spcPct val="115000"/>
+                        </a:lnSpc>
+                        <a:spcAft>
+                          <a:spcPts val="1000"/>
+                        </a:spcAft>
+                        <a:buNone/>
+                      </a:pPr>
+                      <a:r>
+                        <a:rPr lang="en-IN" sz="1100">
+                          <a:effectLst/>
+                        </a:rPr>
+                        <a:t>Pause thread (obsolete)</a:t>
+                      </a:r>
+                      <a:endParaRPr lang="en-IN" sz="1100">
+                        <a:effectLst/>
+                        <a:latin typeface="Calibri" panose="020F0502020204030204" pitchFamily="34" charset="0"/>
+                        <a:ea typeface="Calibri" panose="020F0502020204030204" pitchFamily="34" charset="0"/>
+                        <a:cs typeface="Times New Roman" panose="02020603050405020304" pitchFamily="18" charset="0"/>
+                      </a:endParaRPr>
+                    </a:p>
+                  </a:txBody>
+                  <a:tcPr marL="9525" marR="9525" marT="9525" marB="9525" anchor="ctr"/>
+                </a:tc>
+                <a:extLst>
+                  <a:ext uri="{0D108BD9-81ED-4DB2-BD59-A6C34878D82A}">
+                    <a16:rowId xmlns:a16="http://schemas.microsoft.com/office/drawing/2014/main" val="2868782234"/>
+                  </a:ext>
+                </a:extLst>
+              </a:tr>
+              <a:tr h="384464">
+                <a:tc>
+                  <a:txBody>
+                    <a:bodyPr/>
+                    <a:lstStyle/>
+                    <a:p>
+                      <a:pPr>
+                        <a:lnSpc>
+                          <a:spcPct val="115000"/>
+                        </a:lnSpc>
+                        <a:spcAft>
+                          <a:spcPts val="1000"/>
+                        </a:spcAft>
+                        <a:buNone/>
+                      </a:pPr>
+                      <a:r>
+                        <a:rPr lang="en-IN" sz="1100">
+                          <a:effectLst/>
+                        </a:rPr>
+                        <a:t>Resume()</a:t>
+                      </a:r>
+                      <a:endParaRPr lang="en-IN" sz="1100">
+                        <a:effectLst/>
+                        <a:latin typeface="Calibri" panose="020F0502020204030204" pitchFamily="34" charset="0"/>
+                        <a:ea typeface="Calibri" panose="020F0502020204030204" pitchFamily="34" charset="0"/>
+                        <a:cs typeface="Times New Roman" panose="02020603050405020304" pitchFamily="18" charset="0"/>
+                      </a:endParaRPr>
+                    </a:p>
+                  </a:txBody>
+                  <a:tcPr marL="9525" marR="9525" marT="9525" marB="9525" anchor="ctr"/>
+                </a:tc>
+                <a:tc>
+                  <a:txBody>
+                    <a:bodyPr/>
+                    <a:lstStyle/>
+                    <a:p>
+                      <a:pPr>
+                        <a:lnSpc>
+                          <a:spcPct val="115000"/>
+                        </a:lnSpc>
+                        <a:spcAft>
+                          <a:spcPts val="1000"/>
+                        </a:spcAft>
+                        <a:buNone/>
+                      </a:pPr>
+                      <a:r>
+                        <a:rPr lang="en-IN" sz="1100">
+                          <a:effectLst/>
+                        </a:rPr>
+                        <a:t>Resume suspended thread (obsolete)</a:t>
+                      </a:r>
+                      <a:endParaRPr lang="en-IN" sz="1100">
+                        <a:effectLst/>
+                        <a:latin typeface="Calibri" panose="020F0502020204030204" pitchFamily="34" charset="0"/>
+                        <a:ea typeface="Calibri" panose="020F0502020204030204" pitchFamily="34" charset="0"/>
+                        <a:cs typeface="Times New Roman" panose="02020603050405020304" pitchFamily="18" charset="0"/>
+                      </a:endParaRPr>
+                    </a:p>
+                  </a:txBody>
+                  <a:tcPr marL="9525" marR="9525" marT="9525" marB="9525" anchor="ctr"/>
+                </a:tc>
+                <a:extLst>
+                  <a:ext uri="{0D108BD9-81ED-4DB2-BD59-A6C34878D82A}">
+                    <a16:rowId xmlns:a16="http://schemas.microsoft.com/office/drawing/2014/main" val="2692946464"/>
+                  </a:ext>
+                </a:extLst>
+              </a:tr>
+              <a:tr h="384464">
+                <a:tc>
+                  <a:txBody>
+                    <a:bodyPr/>
+                    <a:lstStyle/>
+                    <a:p>
+                      <a:pPr>
+                        <a:lnSpc>
+                          <a:spcPct val="115000"/>
+                        </a:lnSpc>
+                        <a:spcAft>
+                          <a:spcPts val="1000"/>
+                        </a:spcAft>
+                        <a:buNone/>
+                      </a:pPr>
+                      <a:r>
+                        <a:rPr lang="en-IN" sz="1100">
+                          <a:effectLst/>
+                        </a:rPr>
+                        <a:t>IsAlive</a:t>
+                      </a:r>
+                      <a:endParaRPr lang="en-IN" sz="1100">
+                        <a:effectLst/>
+                        <a:latin typeface="Calibri" panose="020F0502020204030204" pitchFamily="34" charset="0"/>
+                        <a:ea typeface="Calibri" panose="020F0502020204030204" pitchFamily="34" charset="0"/>
+                        <a:cs typeface="Times New Roman" panose="02020603050405020304" pitchFamily="18" charset="0"/>
+                      </a:endParaRPr>
+                    </a:p>
+                  </a:txBody>
+                  <a:tcPr marL="9525" marR="9525" marT="9525" marB="9525" anchor="ctr"/>
+                </a:tc>
+                <a:tc>
+                  <a:txBody>
+                    <a:bodyPr/>
+                    <a:lstStyle/>
+                    <a:p>
+                      <a:pPr>
+                        <a:lnSpc>
+                          <a:spcPct val="115000"/>
+                        </a:lnSpc>
+                        <a:spcAft>
+                          <a:spcPts val="1000"/>
+                        </a:spcAft>
+                        <a:buNone/>
+                      </a:pPr>
+                      <a:r>
+                        <a:rPr lang="en-IN" sz="1100">
+                          <a:effectLst/>
+                        </a:rPr>
+                        <a:t>Check if thread running</a:t>
+                      </a:r>
+                      <a:endParaRPr lang="en-IN" sz="1100">
+                        <a:effectLst/>
+                        <a:latin typeface="Calibri" panose="020F0502020204030204" pitchFamily="34" charset="0"/>
+                        <a:ea typeface="Calibri" panose="020F0502020204030204" pitchFamily="34" charset="0"/>
+                        <a:cs typeface="Times New Roman" panose="02020603050405020304" pitchFamily="18" charset="0"/>
+                      </a:endParaRPr>
+                    </a:p>
+                  </a:txBody>
+                  <a:tcPr marL="9525" marR="9525" marT="9525" marB="9525" anchor="ctr"/>
+                </a:tc>
+                <a:extLst>
+                  <a:ext uri="{0D108BD9-81ED-4DB2-BD59-A6C34878D82A}">
+                    <a16:rowId xmlns:a16="http://schemas.microsoft.com/office/drawing/2014/main" val="3812690980"/>
+                  </a:ext>
+                </a:extLst>
+              </a:tr>
+              <a:tr h="384464">
+                <a:tc>
+                  <a:txBody>
+                    <a:bodyPr/>
+                    <a:lstStyle/>
+                    <a:p>
+                      <a:pPr>
+                        <a:lnSpc>
+                          <a:spcPct val="115000"/>
+                        </a:lnSpc>
+                        <a:spcAft>
+                          <a:spcPts val="1000"/>
+                        </a:spcAft>
+                        <a:buNone/>
+                      </a:pPr>
+                      <a:r>
+                        <a:rPr lang="en-IN" sz="1100">
+                          <a:effectLst/>
+                        </a:rPr>
+                        <a:t>CurrentThread</a:t>
+                      </a:r>
+                      <a:endParaRPr lang="en-IN" sz="1100">
+                        <a:effectLst/>
+                        <a:latin typeface="Calibri" panose="020F0502020204030204" pitchFamily="34" charset="0"/>
+                        <a:ea typeface="Calibri" panose="020F0502020204030204" pitchFamily="34" charset="0"/>
+                        <a:cs typeface="Times New Roman" panose="02020603050405020304" pitchFamily="18" charset="0"/>
+                      </a:endParaRPr>
+                    </a:p>
+                  </a:txBody>
+                  <a:tcPr marL="9525" marR="9525" marT="9525" marB="9525" anchor="ctr"/>
+                </a:tc>
+                <a:tc>
+                  <a:txBody>
+                    <a:bodyPr/>
+                    <a:lstStyle/>
+                    <a:p>
+                      <a:pPr>
+                        <a:lnSpc>
+                          <a:spcPct val="115000"/>
+                        </a:lnSpc>
+                        <a:spcAft>
+                          <a:spcPts val="1000"/>
+                        </a:spcAft>
+                        <a:buNone/>
+                      </a:pPr>
+                      <a:r>
+                        <a:rPr lang="en-IN" sz="1100">
+                          <a:effectLst/>
+                        </a:rPr>
+                        <a:t>Current executing thread</a:t>
+                      </a:r>
+                      <a:endParaRPr lang="en-IN" sz="1100">
+                        <a:effectLst/>
+                        <a:latin typeface="Calibri" panose="020F0502020204030204" pitchFamily="34" charset="0"/>
+                        <a:ea typeface="Calibri" panose="020F0502020204030204" pitchFamily="34" charset="0"/>
+                        <a:cs typeface="Times New Roman" panose="02020603050405020304" pitchFamily="18" charset="0"/>
+                      </a:endParaRPr>
+                    </a:p>
+                  </a:txBody>
+                  <a:tcPr marL="9525" marR="9525" marT="9525" marB="9525" anchor="ctr"/>
+                </a:tc>
+                <a:extLst>
+                  <a:ext uri="{0D108BD9-81ED-4DB2-BD59-A6C34878D82A}">
+                    <a16:rowId xmlns:a16="http://schemas.microsoft.com/office/drawing/2014/main" val="1895113393"/>
+                  </a:ext>
+                </a:extLst>
+              </a:tr>
+              <a:tr h="384464">
+                <a:tc>
+                  <a:txBody>
+                    <a:bodyPr/>
+                    <a:lstStyle/>
+                    <a:p>
+                      <a:pPr>
+                        <a:lnSpc>
+                          <a:spcPct val="115000"/>
+                        </a:lnSpc>
+                        <a:spcAft>
+                          <a:spcPts val="1000"/>
+                        </a:spcAft>
+                        <a:buNone/>
+                      </a:pPr>
+                      <a:r>
+                        <a:rPr lang="en-IN" sz="1100">
+                          <a:effectLst/>
+                        </a:rPr>
+                        <a:t>Yield()</a:t>
+                      </a:r>
+                      <a:endParaRPr lang="en-IN" sz="1100">
+                        <a:effectLst/>
+                        <a:latin typeface="Calibri" panose="020F0502020204030204" pitchFamily="34" charset="0"/>
+                        <a:ea typeface="Calibri" panose="020F0502020204030204" pitchFamily="34" charset="0"/>
+                        <a:cs typeface="Times New Roman" panose="02020603050405020304" pitchFamily="18" charset="0"/>
+                      </a:endParaRPr>
+                    </a:p>
+                  </a:txBody>
+                  <a:tcPr marL="9525" marR="9525" marT="9525" marB="9525" anchor="ctr"/>
+                </a:tc>
+                <a:tc>
+                  <a:txBody>
+                    <a:bodyPr/>
+                    <a:lstStyle/>
+                    <a:p>
+                      <a:pPr>
+                        <a:lnSpc>
+                          <a:spcPct val="115000"/>
+                        </a:lnSpc>
+                        <a:spcAft>
+                          <a:spcPts val="1000"/>
+                        </a:spcAft>
+                        <a:buNone/>
+                      </a:pPr>
+                      <a:r>
+                        <a:rPr lang="en-IN" sz="1100" dirty="0">
+                          <a:effectLst/>
+                        </a:rPr>
+                        <a:t>Gives chance to another thread</a:t>
+                      </a:r>
+                      <a:endParaRPr lang="en-IN" sz="1100" dirty="0">
+                        <a:effectLst/>
+                        <a:latin typeface="Calibri" panose="020F0502020204030204" pitchFamily="34" charset="0"/>
+                        <a:ea typeface="Calibri" panose="020F0502020204030204" pitchFamily="34" charset="0"/>
+                        <a:cs typeface="Times New Roman" panose="02020603050405020304" pitchFamily="18" charset="0"/>
+                      </a:endParaRPr>
+                    </a:p>
+                  </a:txBody>
+                  <a:tcPr marL="9525" marR="9525" marT="9525" marB="9525" anchor="ctr"/>
+                </a:tc>
+                <a:extLst>
+                  <a:ext uri="{0D108BD9-81ED-4DB2-BD59-A6C34878D82A}">
+                    <a16:rowId xmlns:a16="http://schemas.microsoft.com/office/drawing/2014/main" val="3520341797"/>
+                  </a:ext>
+                </a:extLst>
+              </a:tr>
+            </a:tbl>
+          </a:graphicData>
+        </a:graphic>
+      </p:graphicFrame>
+    </p:spTree>
+    <p:extLst>
+      <p:ext uri="{BB962C8B-B14F-4D97-AF65-F5344CB8AC3E}">
+        <p14:creationId xmlns:p14="http://schemas.microsoft.com/office/powerpoint/2010/main" val="2088546586"/>
+      </p:ext>
+    </p:extLst>
+  </p:cSld>
+  <p:clrMapOvr>
+    <a:masterClrMapping/>
+  </p:clrMapOvr>
+</p:sld>
+</file>
+
+<file path=ppt/slides/slide16.xml><?xml version="1.0" encoding="utf-8"?>
+<p:sld xmlns:a="http://schemas.openxmlformats.org/drawingml/2006/main" xmlns:r="http://schemas.openxmlformats.org/officeDocument/2006/relationships" xmlns:p="http://schemas.openxmlformats.org/presentationml/2006/main">
+  <p:cSld>
+    <p:spTree>
+      <p:nvGrpSpPr>
+        <p:cNvPr id="1" name=""/>
+        <p:cNvGrpSpPr/>
+        <p:nvPr/>
+      </p:nvGrpSpPr>
+      <p:grpSpPr>
+        <a:xfrm>
+          <a:off x="0" y="0"/>
+          <a:ext cx="0" cy="0"/>
+          <a:chOff x="0" y="0"/>
+          <a:chExt cx="0" cy="0"/>
+        </a:xfrm>
+      </p:grpSpPr>
+      <p:sp>
+        <p:nvSpPr>
           <p:cNvPr id="4" name="Rectangle 3">
             <a:extLst>
               <a:ext uri="{FF2B5EF4-FFF2-40B4-BE49-F238E27FC236}">
@@ -21478,7 +22326,7 @@
 </p:sld>
 </file>
 
-<file path=ppt/slides/slide16.xml><?xml version="1.0" encoding="utf-8"?>
+<file path=ppt/slides/slide17.xml><?xml version="1.0" encoding="utf-8"?>
 <p:sld xmlns:a="http://schemas.openxmlformats.org/drawingml/2006/main" xmlns:r="http://schemas.openxmlformats.org/officeDocument/2006/relationships" xmlns:p="http://schemas.openxmlformats.org/presentationml/2006/main">
   <p:cSld>
     <p:spTree>
